--- a/Documents/Research/presentation/software project presentation001.pptx
+++ b/Documents/Research/presentation/software project presentation001.pptx
@@ -260,7 +260,7 @@
           <a:p>
             <a:fld id="{0D0C02FD-B8F4-47E3-806A-911F224AE4B6}" type="datetimeFigureOut">
               <a:rPr lang="en-US" smtClean="0"/>
-              <a:t>11/25/2025</a:t>
+              <a:t>12/14/2025</a:t>
             </a:fld>
             <a:endParaRPr lang="en-US"/>
           </a:p>
@@ -458,7 +458,7 @@
           <a:p>
             <a:fld id="{0D0C02FD-B8F4-47E3-806A-911F224AE4B6}" type="datetimeFigureOut">
               <a:rPr lang="en-US" smtClean="0"/>
-              <a:t>11/25/2025</a:t>
+              <a:t>12/14/2025</a:t>
             </a:fld>
             <a:endParaRPr lang="en-US"/>
           </a:p>
@@ -666,7 +666,7 @@
           <a:p>
             <a:fld id="{0D0C02FD-B8F4-47E3-806A-911F224AE4B6}" type="datetimeFigureOut">
               <a:rPr lang="en-US" smtClean="0"/>
-              <a:t>11/25/2025</a:t>
+              <a:t>12/14/2025</a:t>
             </a:fld>
             <a:endParaRPr lang="en-US"/>
           </a:p>
@@ -864,7 +864,7 @@
           <a:p>
             <a:fld id="{0D0C02FD-B8F4-47E3-806A-911F224AE4B6}" type="datetimeFigureOut">
               <a:rPr lang="en-US" smtClean="0"/>
-              <a:t>11/25/2025</a:t>
+              <a:t>12/14/2025</a:t>
             </a:fld>
             <a:endParaRPr lang="en-US"/>
           </a:p>
@@ -1139,7 +1139,7 @@
           <a:p>
             <a:fld id="{0D0C02FD-B8F4-47E3-806A-911F224AE4B6}" type="datetimeFigureOut">
               <a:rPr lang="en-US" smtClean="0"/>
-              <a:t>11/25/2025</a:t>
+              <a:t>12/14/2025</a:t>
             </a:fld>
             <a:endParaRPr lang="en-US"/>
           </a:p>
@@ -1404,7 +1404,7 @@
           <a:p>
             <a:fld id="{0D0C02FD-B8F4-47E3-806A-911F224AE4B6}" type="datetimeFigureOut">
               <a:rPr lang="en-US" smtClean="0"/>
-              <a:t>11/25/2025</a:t>
+              <a:t>12/14/2025</a:t>
             </a:fld>
             <a:endParaRPr lang="en-US"/>
           </a:p>
@@ -1816,7 +1816,7 @@
           <a:p>
             <a:fld id="{0D0C02FD-B8F4-47E3-806A-911F224AE4B6}" type="datetimeFigureOut">
               <a:rPr lang="en-US" smtClean="0"/>
-              <a:t>11/25/2025</a:t>
+              <a:t>12/14/2025</a:t>
             </a:fld>
             <a:endParaRPr lang="en-US"/>
           </a:p>
@@ -1957,7 +1957,7 @@
           <a:p>
             <a:fld id="{0D0C02FD-B8F4-47E3-806A-911F224AE4B6}" type="datetimeFigureOut">
               <a:rPr lang="en-US" smtClean="0"/>
-              <a:t>11/25/2025</a:t>
+              <a:t>12/14/2025</a:t>
             </a:fld>
             <a:endParaRPr lang="en-US"/>
           </a:p>
@@ -2070,7 +2070,7 @@
           <a:p>
             <a:fld id="{0D0C02FD-B8F4-47E3-806A-911F224AE4B6}" type="datetimeFigureOut">
               <a:rPr lang="en-US" smtClean="0"/>
-              <a:t>11/25/2025</a:t>
+              <a:t>12/14/2025</a:t>
             </a:fld>
             <a:endParaRPr lang="en-US"/>
           </a:p>
@@ -2381,7 +2381,7 @@
           <a:p>
             <a:fld id="{0D0C02FD-B8F4-47E3-806A-911F224AE4B6}" type="datetimeFigureOut">
               <a:rPr lang="en-US" smtClean="0"/>
-              <a:t>11/25/2025</a:t>
+              <a:t>12/14/2025</a:t>
             </a:fld>
             <a:endParaRPr lang="en-US"/>
           </a:p>
@@ -2669,7 +2669,7 @@
           <a:p>
             <a:fld id="{0D0C02FD-B8F4-47E3-806A-911F224AE4B6}" type="datetimeFigureOut">
               <a:rPr lang="en-US" smtClean="0"/>
-              <a:t>11/25/2025</a:t>
+              <a:t>12/14/2025</a:t>
             </a:fld>
             <a:endParaRPr lang="en-US"/>
           </a:p>
@@ -2910,7 +2910,7 @@
           <a:p>
             <a:fld id="{0D0C02FD-B8F4-47E3-806A-911F224AE4B6}" type="datetimeFigureOut">
               <a:rPr lang="en-US" smtClean="0"/>
-              <a:t>11/25/2025</a:t>
+              <a:t>12/14/2025</a:t>
             </a:fld>
             <a:endParaRPr lang="en-US"/>
           </a:p>
@@ -3355,7 +3355,7 @@
         </p:blipFill>
         <p:spPr>
           <a:xfrm>
-            <a:off x="8086763" y="3287628"/>
+            <a:off x="9950523" y="3076730"/>
             <a:ext cx="982248" cy="982246"/>
           </a:xfrm>
           <a:prstGeom prst="rect">
@@ -3391,7 +3391,7 @@
         </p:blipFill>
         <p:spPr>
           <a:xfrm>
-            <a:off x="8424326" y="1487995"/>
+            <a:off x="9926047" y="1573597"/>
             <a:ext cx="928530" cy="928528"/>
           </a:xfrm>
           <a:prstGeom prst="rect">
@@ -3449,7 +3449,7 @@
         </p:nvGrpSpPr>
         <p:grpSpPr>
           <a:xfrm>
-            <a:off x="1617243" y="2233759"/>
+            <a:off x="691119" y="2139159"/>
             <a:ext cx="2113016" cy="1704390"/>
             <a:chOff x="4887552" y="138577"/>
             <a:chExt cx="2476500" cy="1997581"/>
@@ -3864,12 +3864,47 @@
           </p:txBody>
         </p:sp>
       </p:grpSp>
+      <p:sp>
+        <p:nvSpPr>
+          <p:cNvPr id="87" name="TextBox 86">
+            <a:extLst>
+              <a:ext uri="{FF2B5EF4-FFF2-40B4-BE49-F238E27FC236}">
+                <a16:creationId xmlns:a16="http://schemas.microsoft.com/office/drawing/2014/main" id="{323D41DD-8966-7CD3-8A84-BE64D6065824}"/>
+              </a:ext>
+            </a:extLst>
+          </p:cNvPr>
+          <p:cNvSpPr txBox="1"/>
+          <p:nvPr/>
+        </p:nvSpPr>
+        <p:spPr>
+          <a:xfrm>
+            <a:off x="3573700" y="69924"/>
+            <a:ext cx="1155019" cy="317593"/>
+          </a:xfrm>
+          <a:prstGeom prst="rect">
+            <a:avLst/>
+          </a:prstGeom>
+          <a:noFill/>
+        </p:spPr>
+        <p:txBody>
+          <a:bodyPr wrap="square" rtlCol="0">
+            <a:spAutoFit/>
+          </a:bodyPr>
+          <a:lstStyle/>
+          <a:p>
+            <a:r>
+              <a:rPr lang="en-US" dirty="0"/>
+              <a:t>account</a:t>
+            </a:r>
+          </a:p>
+        </p:txBody>
+      </p:sp>
       <p:grpSp>
         <p:nvGrpSpPr>
-          <p:cNvPr id="6" name="Group 5">
-            <a:extLst>
-              <a:ext uri="{FF2B5EF4-FFF2-40B4-BE49-F238E27FC236}">
-                <a16:creationId xmlns:a16="http://schemas.microsoft.com/office/drawing/2014/main" id="{E1B78A60-763D-874A-7434-BFE10B60F3F5}"/>
+          <p:cNvPr id="27" name="Group 26">
+            <a:extLst>
+              <a:ext uri="{FF2B5EF4-FFF2-40B4-BE49-F238E27FC236}">
+                <a16:creationId xmlns:a16="http://schemas.microsoft.com/office/drawing/2014/main" id="{F3B8EDA0-FE3A-0D93-D2DD-28601267F33A}"/>
               </a:ext>
             </a:extLst>
           </p:cNvPr>
@@ -3878,156 +3913,12 @@
         </p:nvGrpSpPr>
         <p:grpSpPr>
           <a:xfrm>
-            <a:off x="1767211" y="405754"/>
-            <a:ext cx="3897999" cy="1752429"/>
-            <a:chOff x="354527" y="2541467"/>
-            <a:chExt cx="4533025" cy="2037918"/>
+            <a:off x="3151529" y="450552"/>
+            <a:ext cx="1851348" cy="1428450"/>
+            <a:chOff x="3151529" y="450552"/>
+            <a:chExt cx="1851348" cy="1428450"/>
           </a:xfrm>
         </p:grpSpPr>
-        <p:pic>
-          <p:nvPicPr>
-            <p:cNvPr id="82" name="Picture 81">
-              <a:extLst>
-                <a:ext uri="{FF2B5EF4-FFF2-40B4-BE49-F238E27FC236}">
-                  <a16:creationId xmlns:a16="http://schemas.microsoft.com/office/drawing/2014/main" id="{C27814F7-FEEF-EBF2-FADB-54257AAA4539}"/>
-                </a:ext>
-              </a:extLst>
-            </p:cNvPr>
-            <p:cNvPicPr>
-              <a:picLocks noChangeAspect="1"/>
-            </p:cNvPicPr>
-            <p:nvPr/>
-          </p:nvPicPr>
-          <p:blipFill>
-            <a:blip r:embed="rId5">
-              <a:extLst>
-                <a:ext uri="{28A0092B-C50C-407E-A947-70E740481C1C}">
-                  <a14:useLocalDpi xmlns:a14="http://schemas.microsoft.com/office/drawing/2010/main" val="0"/>
-                </a:ext>
-              </a:extLst>
-            </a:blip>
-            <a:stretch>
-              <a:fillRect/>
-            </a:stretch>
-          </p:blipFill>
-          <p:spPr>
-            <a:xfrm>
-              <a:off x="1774954" y="3044007"/>
-              <a:ext cx="938980" cy="938980"/>
-            </a:xfrm>
-            <a:prstGeom prst="rect">
-              <a:avLst/>
-            </a:prstGeom>
-          </p:spPr>
-        </p:pic>
-        <p:pic>
-          <p:nvPicPr>
-            <p:cNvPr id="83" name="Picture 82">
-              <a:extLst>
-                <a:ext uri="{FF2B5EF4-FFF2-40B4-BE49-F238E27FC236}">
-                  <a16:creationId xmlns:a16="http://schemas.microsoft.com/office/drawing/2014/main" id="{8A4DC32B-FA36-1B3E-E900-A304DCFFA291}"/>
-                </a:ext>
-              </a:extLst>
-            </p:cNvPr>
-            <p:cNvPicPr>
-              <a:picLocks noChangeAspect="1"/>
-            </p:cNvPicPr>
-            <p:nvPr/>
-          </p:nvPicPr>
-          <p:blipFill>
-            <a:blip r:embed="rId5">
-              <a:extLst>
-                <a:ext uri="{28A0092B-C50C-407E-A947-70E740481C1C}">
-                  <a14:useLocalDpi xmlns:a14="http://schemas.microsoft.com/office/drawing/2010/main" val="0"/>
-                </a:ext>
-              </a:extLst>
-            </a:blip>
-            <a:stretch>
-              <a:fillRect/>
-            </a:stretch>
-          </p:blipFill>
-          <p:spPr>
-            <a:xfrm>
-              <a:off x="596493" y="3254508"/>
-              <a:ext cx="938980" cy="938980"/>
-            </a:xfrm>
-            <a:prstGeom prst="rect">
-              <a:avLst/>
-            </a:prstGeom>
-          </p:spPr>
-        </p:pic>
-        <p:sp>
-          <p:nvSpPr>
-            <p:cNvPr id="84" name="TextBox 83">
-              <a:extLst>
-                <a:ext uri="{FF2B5EF4-FFF2-40B4-BE49-F238E27FC236}">
-                  <a16:creationId xmlns:a16="http://schemas.microsoft.com/office/drawing/2014/main" id="{461A5F0A-C0FE-0439-A662-D04EBDEA7E28}"/>
-                </a:ext>
-              </a:extLst>
-            </p:cNvPr>
-            <p:cNvSpPr txBox="1"/>
-            <p:nvPr/>
-          </p:nvSpPr>
-          <p:spPr>
-            <a:xfrm>
-              <a:off x="354527" y="4182485"/>
-              <a:ext cx="1767652" cy="357917"/>
-            </a:xfrm>
-            <a:prstGeom prst="rect">
-              <a:avLst/>
-            </a:prstGeom>
-            <a:noFill/>
-          </p:spPr>
-          <p:txBody>
-            <a:bodyPr wrap="square" rtlCol="0">
-              <a:spAutoFit/>
-            </a:bodyPr>
-            <a:lstStyle/>
-            <a:p>
-              <a:r>
-                <a:rPr lang="en-US" sz="1400" dirty="0" err="1"/>
-                <a:t>Profile_personal</a:t>
-              </a:r>
-              <a:endParaRPr lang="en-US" dirty="0"/>
-            </a:p>
-          </p:txBody>
-        </p:sp>
-        <p:sp>
-          <p:nvSpPr>
-            <p:cNvPr id="85" name="TextBox 84">
-              <a:extLst>
-                <a:ext uri="{FF2B5EF4-FFF2-40B4-BE49-F238E27FC236}">
-                  <a16:creationId xmlns:a16="http://schemas.microsoft.com/office/drawing/2014/main" id="{B04893AB-F1D6-2D6F-771A-FC3AB6BE126B}"/>
-                </a:ext>
-              </a:extLst>
-            </p:cNvPr>
-            <p:cNvSpPr txBox="1"/>
-            <p:nvPr/>
-          </p:nvSpPr>
-          <p:spPr>
-            <a:xfrm>
-              <a:off x="1602779" y="3942944"/>
-              <a:ext cx="1435653" cy="357917"/>
-            </a:xfrm>
-            <a:prstGeom prst="rect">
-              <a:avLst/>
-            </a:prstGeom>
-            <a:noFill/>
-          </p:spPr>
-          <p:txBody>
-            <a:bodyPr wrap="square" rtlCol="0">
-              <a:spAutoFit/>
-            </a:bodyPr>
-            <a:lstStyle/>
-            <a:p>
-              <a:r>
-                <a:rPr lang="en-US" sz="1400" dirty="0" err="1"/>
-                <a:t>Profile_others</a:t>
-              </a:r>
-              <a:endParaRPr lang="en-US" dirty="0"/>
-            </a:p>
-          </p:txBody>
-        </p:sp>
         <p:sp>
           <p:nvSpPr>
             <p:cNvPr id="86" name="Rectangle 85">
@@ -4042,8 +3933,8 @@
           </p:nvSpPr>
           <p:spPr>
             <a:xfrm>
-              <a:off x="443449" y="2918225"/>
-              <a:ext cx="4444103" cy="1661160"/>
+              <a:off x="3151529" y="450552"/>
+              <a:ext cx="1851348" cy="1428450"/>
             </a:xfrm>
             <a:prstGeom prst="rect">
               <a:avLst/>
@@ -4078,41 +3969,6 @@
             </a:p>
           </p:txBody>
         </p:sp>
-        <p:sp>
-          <p:nvSpPr>
-            <p:cNvPr id="87" name="TextBox 86">
-              <a:extLst>
-                <a:ext uri="{FF2B5EF4-FFF2-40B4-BE49-F238E27FC236}">
-                  <a16:creationId xmlns:a16="http://schemas.microsoft.com/office/drawing/2014/main" id="{323D41DD-8966-7CD3-8A84-BE64D6065824}"/>
-                </a:ext>
-              </a:extLst>
-            </p:cNvPr>
-            <p:cNvSpPr txBox="1"/>
-            <p:nvPr/>
-          </p:nvSpPr>
-          <p:spPr>
-            <a:xfrm>
-              <a:off x="1993908" y="2541467"/>
-              <a:ext cx="1343184" cy="369332"/>
-            </a:xfrm>
-            <a:prstGeom prst="rect">
-              <a:avLst/>
-            </a:prstGeom>
-            <a:noFill/>
-          </p:spPr>
-          <p:txBody>
-            <a:bodyPr wrap="square" rtlCol="0">
-              <a:spAutoFit/>
-            </a:bodyPr>
-            <a:lstStyle/>
-            <a:p>
-              <a:r>
-                <a:rPr lang="en-US" dirty="0"/>
-                <a:t>account</a:t>
-              </a:r>
-            </a:p>
-          </p:txBody>
-        </p:sp>
         <p:pic>
           <p:nvPicPr>
             <p:cNvPr id="100" name="Picture 99">
@@ -4141,8 +3997,8 @@
           </p:blipFill>
           <p:spPr>
             <a:xfrm>
-              <a:off x="2814316" y="3270040"/>
-              <a:ext cx="938980" cy="938980"/>
+              <a:off x="3220078" y="753081"/>
+              <a:ext cx="807439" cy="807440"/>
             </a:xfrm>
             <a:prstGeom prst="rect">
               <a:avLst/>
@@ -4163,8 +4019,8 @@
           </p:nvSpPr>
           <p:spPr>
             <a:xfrm>
-              <a:off x="3047878" y="4182485"/>
-              <a:ext cx="849261" cy="357917"/>
+              <a:off x="3420921" y="1537703"/>
+              <a:ext cx="730289" cy="307777"/>
             </a:xfrm>
             <a:prstGeom prst="rect">
               <a:avLst/>
@@ -4213,8 +4069,8 @@
           </p:blipFill>
           <p:spPr>
             <a:xfrm>
-              <a:off x="3833012" y="3279315"/>
-              <a:ext cx="938980" cy="938980"/>
+              <a:off x="4096066" y="761057"/>
+              <a:ext cx="807439" cy="807440"/>
             </a:xfrm>
             <a:prstGeom prst="rect">
               <a:avLst/>
@@ -4235,8 +4091,8 @@
           </p:nvSpPr>
           <p:spPr>
             <a:xfrm>
-              <a:off x="3897140" y="4202261"/>
-              <a:ext cx="874851" cy="357917"/>
+              <a:off x="4151211" y="1554709"/>
+              <a:ext cx="752294" cy="307777"/>
             </a:xfrm>
             <a:prstGeom prst="rect">
               <a:avLst/>
@@ -4272,7 +4128,7 @@
         </p:nvGrpSpPr>
         <p:grpSpPr>
           <a:xfrm>
-            <a:off x="3966280" y="4699818"/>
+            <a:off x="3845248" y="4952246"/>
             <a:ext cx="3980964" cy="1836786"/>
             <a:chOff x="4766447" y="4665830"/>
             <a:chExt cx="3980964" cy="1836786"/>
@@ -4988,10 +4844,10 @@
         </p:nvGrpSpPr>
         <p:grpSpPr>
           <a:xfrm>
-            <a:off x="8345676" y="4426469"/>
-            <a:ext cx="2917411" cy="1609824"/>
-            <a:chOff x="8889561" y="4707544"/>
-            <a:chExt cx="2917411" cy="1609824"/>
+            <a:off x="8746341" y="4806030"/>
+            <a:ext cx="2917411" cy="1507283"/>
+            <a:chOff x="8889561" y="4810085"/>
+            <a:chExt cx="2917411" cy="1507283"/>
           </a:xfrm>
         </p:grpSpPr>
         <p:pic>
@@ -5134,7 +4990,7 @@
           </p:nvSpPr>
           <p:spPr>
             <a:xfrm>
-              <a:off x="9851799" y="4707544"/>
+              <a:off x="9952789" y="4810085"/>
               <a:ext cx="682110" cy="369332"/>
             </a:xfrm>
             <a:prstGeom prst="rect">
@@ -5258,6 +5114,7 @@
             </a:extLst>
           </p:cNvPr>
           <p:cNvCxnSpPr>
+            <a:cxnSpLocks/>
             <a:stCxn id="5" idx="1"/>
           </p:cNvCxnSpPr>
           <p:nvPr/>
@@ -5265,20 +5122,22 @@
         <p:spPr>
           <a:xfrm rot="10800000">
             <a:off x="6882581" y="3287629"/>
-            <a:ext cx="1204182" cy="491123"/>
+            <a:ext cx="3067942" cy="280225"/>
           </a:xfrm>
           <a:prstGeom prst="bentConnector3">
-            <a:avLst/>
+            <a:avLst>
+              <a:gd name="adj1" fmla="val 50000"/>
+            </a:avLst>
           </a:prstGeom>
         </p:spPr>
         <p:style>
-          <a:lnRef idx="2">
+          <a:lnRef idx="3">
             <a:schemeClr val="dk1"/>
           </a:lnRef>
           <a:fillRef idx="0">
             <a:schemeClr val="dk1"/>
           </a:fillRef>
-          <a:effectRef idx="1">
+          <a:effectRef idx="2">
             <a:schemeClr val="dk1"/>
           </a:effectRef>
           <a:fontRef idx="minor">
@@ -5303,22 +5162,22 @@
         </p:nvCxnSpPr>
         <p:spPr>
           <a:xfrm rot="10800000" flipV="1">
-            <a:off x="6882582" y="1952259"/>
-            <a:ext cx="1541745" cy="1227844"/>
+            <a:off x="6827631" y="2037860"/>
+            <a:ext cx="3098416" cy="1056641"/>
           </a:xfrm>
           <a:prstGeom prst="bentConnector3">
             <a:avLst/>
           </a:prstGeom>
         </p:spPr>
         <p:style>
-          <a:lnRef idx="2">
-            <a:schemeClr val="accent1"/>
+          <a:lnRef idx="3">
+            <a:schemeClr val="accent6"/>
           </a:lnRef>
           <a:fillRef idx="0">
-            <a:schemeClr val="accent1"/>
+            <a:schemeClr val="accent6"/>
           </a:fillRef>
-          <a:effectRef idx="1">
-            <a:schemeClr val="accent1"/>
+          <a:effectRef idx="2">
+            <a:schemeClr val="accent6"/>
           </a:effectRef>
           <a:fontRef idx="minor">
             <a:schemeClr val="tx1"/>
@@ -5381,12 +5240,12 @@
         </p:nvCxnSpPr>
         <p:spPr>
           <a:xfrm rot="10800000">
-            <a:off x="5995010" y="3651145"/>
-            <a:ext cx="3312904" cy="959991"/>
+            <a:off x="6434433" y="3602814"/>
+            <a:ext cx="3375136" cy="1387883"/>
           </a:xfrm>
           <a:prstGeom prst="bentConnector3">
             <a:avLst>
-              <a:gd name="adj1" fmla="val 57820"/>
+              <a:gd name="adj1" fmla="val 50000"/>
             </a:avLst>
           </a:prstGeom>
         </p:spPr>
@@ -5422,8 +5281,8 @@
         </p:nvCxnSpPr>
         <p:spPr>
           <a:xfrm flipV="1">
-            <a:off x="5975528" y="3698240"/>
-            <a:ext cx="0" cy="1001578"/>
+            <a:off x="5854496" y="3778751"/>
+            <a:ext cx="22700" cy="1173495"/>
           </a:xfrm>
           <a:prstGeom prst="line">
             <a:avLst/>
@@ -5492,14 +5351,15 @@
             </a:extLst>
           </p:cNvPr>
           <p:cNvCxnSpPr>
+            <a:cxnSpLocks/>
             <a:stCxn id="56" idx="3"/>
           </p:cNvCxnSpPr>
           <p:nvPr/>
         </p:nvCxnSpPr>
         <p:spPr>
-          <a:xfrm flipV="1">
-            <a:off x="3730259" y="3229475"/>
-            <a:ext cx="1188682" cy="1"/>
+          <a:xfrm>
+            <a:off x="2804135" y="3134876"/>
+            <a:ext cx="2067676" cy="142729"/>
           </a:xfrm>
           <a:prstGeom prst="bentConnector3">
             <a:avLst/>
@@ -5536,8 +5396,8 @@
         </p:nvCxnSpPr>
         <p:spPr>
           <a:xfrm rot="16200000" flipH="1">
-            <a:off x="4028783" y="2265477"/>
-            <a:ext cx="988264" cy="807691"/>
+            <a:off x="4019031" y="2157794"/>
+            <a:ext cx="1168234" cy="750116"/>
           </a:xfrm>
           <a:prstGeom prst="bentConnector3">
             <a:avLst>
